--- a/1)цт в менеджменте/11 Работа с MS Office.pptx
+++ b/1)цт в менеджменте/11 Работа с MS Office.pptx
@@ -296,7 +296,7 @@
             <a:fld id="{6A1DBB08-F6AD-4B9E-A2D8-7F4CDC30666D}" type="datetimeFigureOut">
               <a:rPr lang="ru-RU" smtClean="0"/>
               <a:pPr/>
-              <a:t>19.11.2025</a:t>
+              <a:t>19.04.2026</a:t>
             </a:fld>
             <a:endParaRPr lang="ru-RU"/>
           </a:p>
@@ -463,7 +463,7 @@
             <a:fld id="{6A1DBB08-F6AD-4B9E-A2D8-7F4CDC30666D}" type="datetimeFigureOut">
               <a:rPr lang="ru-RU" smtClean="0"/>
               <a:pPr/>
-              <a:t>19.11.2025</a:t>
+              <a:t>19.04.2026</a:t>
             </a:fld>
             <a:endParaRPr lang="ru-RU"/>
           </a:p>
@@ -640,7 +640,7 @@
             <a:fld id="{6A1DBB08-F6AD-4B9E-A2D8-7F4CDC30666D}" type="datetimeFigureOut">
               <a:rPr lang="ru-RU" smtClean="0"/>
               <a:pPr/>
-              <a:t>19.11.2025</a:t>
+              <a:t>19.04.2026</a:t>
             </a:fld>
             <a:endParaRPr lang="ru-RU"/>
           </a:p>
@@ -807,7 +807,7 @@
             <a:fld id="{6A1DBB08-F6AD-4B9E-A2D8-7F4CDC30666D}" type="datetimeFigureOut">
               <a:rPr lang="ru-RU" smtClean="0"/>
               <a:pPr/>
-              <a:t>19.11.2025</a:t>
+              <a:t>19.04.2026</a:t>
             </a:fld>
             <a:endParaRPr lang="ru-RU"/>
           </a:p>
@@ -1050,7 +1050,7 @@
             <a:fld id="{6A1DBB08-F6AD-4B9E-A2D8-7F4CDC30666D}" type="datetimeFigureOut">
               <a:rPr lang="ru-RU" smtClean="0"/>
               <a:pPr/>
-              <a:t>19.11.2025</a:t>
+              <a:t>19.04.2026</a:t>
             </a:fld>
             <a:endParaRPr lang="ru-RU"/>
           </a:p>
@@ -1335,7 +1335,7 @@
             <a:fld id="{6A1DBB08-F6AD-4B9E-A2D8-7F4CDC30666D}" type="datetimeFigureOut">
               <a:rPr lang="ru-RU" smtClean="0"/>
               <a:pPr/>
-              <a:t>19.11.2025</a:t>
+              <a:t>19.04.2026</a:t>
             </a:fld>
             <a:endParaRPr lang="ru-RU"/>
           </a:p>
@@ -1754,7 +1754,7 @@
             <a:fld id="{6A1DBB08-F6AD-4B9E-A2D8-7F4CDC30666D}" type="datetimeFigureOut">
               <a:rPr lang="ru-RU" smtClean="0"/>
               <a:pPr/>
-              <a:t>19.11.2025</a:t>
+              <a:t>19.04.2026</a:t>
             </a:fld>
             <a:endParaRPr lang="ru-RU"/>
           </a:p>
@@ -1869,7 +1869,7 @@
             <a:fld id="{6A1DBB08-F6AD-4B9E-A2D8-7F4CDC30666D}" type="datetimeFigureOut">
               <a:rPr lang="ru-RU" smtClean="0"/>
               <a:pPr/>
-              <a:t>19.11.2025</a:t>
+              <a:t>19.04.2026</a:t>
             </a:fld>
             <a:endParaRPr lang="ru-RU"/>
           </a:p>
@@ -1961,7 +1961,7 @@
             <a:fld id="{6A1DBB08-F6AD-4B9E-A2D8-7F4CDC30666D}" type="datetimeFigureOut">
               <a:rPr lang="ru-RU" smtClean="0"/>
               <a:pPr/>
-              <a:t>19.11.2025</a:t>
+              <a:t>19.04.2026</a:t>
             </a:fld>
             <a:endParaRPr lang="ru-RU"/>
           </a:p>
@@ -2235,7 +2235,7 @@
             <a:fld id="{6A1DBB08-F6AD-4B9E-A2D8-7F4CDC30666D}" type="datetimeFigureOut">
               <a:rPr lang="ru-RU" smtClean="0"/>
               <a:pPr/>
-              <a:t>19.11.2025</a:t>
+              <a:t>19.04.2026</a:t>
             </a:fld>
             <a:endParaRPr lang="ru-RU"/>
           </a:p>
@@ -2485,7 +2485,7 @@
             <a:fld id="{6A1DBB08-F6AD-4B9E-A2D8-7F4CDC30666D}" type="datetimeFigureOut">
               <a:rPr lang="ru-RU" smtClean="0"/>
               <a:pPr/>
-              <a:t>19.11.2025</a:t>
+              <a:t>19.04.2026</a:t>
             </a:fld>
             <a:endParaRPr lang="ru-RU"/>
           </a:p>
@@ -2695,7 +2695,7 @@
             <a:fld id="{6A1DBB08-F6AD-4B9E-A2D8-7F4CDC30666D}" type="datetimeFigureOut">
               <a:rPr lang="ru-RU" smtClean="0"/>
               <a:pPr/>
-              <a:t>19.11.2025</a:t>
+              <a:t>19.04.2026</a:t>
             </a:fld>
             <a:endParaRPr lang="ru-RU"/>
           </a:p>
@@ -3096,11 +3096,11 @@
             </a:br>
             <a:r>
               <a:rPr lang="ru-RU" dirty="0" smtClean="0"/>
-              <a:t>Слияние документов в </a:t>
+              <a:t>Работа с </a:t>
             </a:r>
             <a:r>
               <a:rPr lang="en-US" dirty="0" smtClean="0"/>
-              <a:t>Word</a:t>
+              <a:t>MS Office</a:t>
             </a:r>
             <a:endParaRPr lang="ru-RU" dirty="0"/>
           </a:p>
